--- a/evidence/2026-10-02/run-fair/raw/libreoffice/template-mutation/measured-2.pptx
+++ b/evidence/2026-10-02/run-fair/raw/libreoffice/template-mutation/measured-2.pptx
@@ -424,7 +424,7 @@
             <a:pPr indent="0" algn="r">
               <a:buNone/>
             </a:pPr>
-            <a:fld id="{3115355A-3C1F-4988-8D70-B3774EB2C110}" type="slidenum">
+            <a:fld id="{B45BA59A-9566-4609-BBC9-8D1C78A7771D}" type="slidenum">
               <a:rPr lang="en-US" sz="1400" b="0" u="none" strike="noStrike">
                 <a:solidFill>
                   <a:srgbClr val="000000"/>
@@ -598,7 +598,7 @@
               </a:lnSpc>
               <a:buNone/>
             </a:pPr>
-            <a:fld id="{DC0BF1C2-5ABB-4291-B5CE-24EF9861BBEE}" type="slidenum">
+            <a:fld id="{49EAA5DF-DEAD-47F9-955E-56CEA50F5CE4}" type="slidenum">
               <a:rPr lang="en-US" sz="1200" b="0" u="none" strike="noStrike">
                 <a:solidFill>
                   <a:srgbClr val="000000"/>
@@ -915,7 +915,7 @@
               </a:lnSpc>
               <a:buNone/>
             </a:pPr>
-            <a:fld id="{D3D06D35-9E00-4717-A25F-062C63CD4A47}" type="slidenum">
+            <a:fld id="{0AB7F20F-586B-44F1-BD04-FDE6C4954020}" type="slidenum">
               <a:rPr lang="en-US" sz="1200" b="0" u="none" strike="noStrike">
                 <a:solidFill>
                   <a:schemeClr val="dk1">
@@ -1627,7 +1627,7 @@
               </a:lnSpc>
               <a:buNone/>
             </a:pPr>
-            <a:fld id="{A432AF74-235D-4765-AEA0-CBF22911EB52}" type="slidenum">
+            <a:fld id="{84B910CC-C692-43B7-86BB-7F86A735EA6B}" type="slidenum">
               <a:rPr lang="en-US" sz="1200" b="0" u="none" strike="noStrike">
                 <a:solidFill>
                   <a:schemeClr val="dk1">
@@ -2086,7 +2086,7 @@
               </a:lnSpc>
               <a:buNone/>
             </a:pPr>
-            <a:fld id="{85E1A8BB-5F7C-4A97-91C0-A6C0292D0989}" type="slidenum">
+            <a:fld id="{033A6342-5B5A-4AC3-A563-C2FAAE9FCC4C}" type="slidenum">
               <a:rPr lang="en-US" sz="1200" b="0" u="none" strike="noStrike">
                 <a:solidFill>
                   <a:schemeClr val="dk1">
@@ -2714,7 +2714,7 @@
               </a:lnSpc>
               <a:buNone/>
             </a:pPr>
-            <a:fld id="{BCE84CD6-0FC6-412F-B26D-0CAD34D446F5}" type="slidenum">
+            <a:fld id="{CF4B3C8A-845C-4966-AB8D-820229967ABE}" type="slidenum">
               <a:rPr lang="en-US" sz="1200" b="0" u="none" strike="noStrike">
                 <a:solidFill>
                   <a:schemeClr val="dk1">
@@ -3342,7 +3342,7 @@
               </a:lnSpc>
               <a:buNone/>
             </a:pPr>
-            <a:fld id="{23751D05-1D1D-4EE7-B371-B90DFA4C49BD}" type="slidenum">
+            <a:fld id="{8CC63160-A215-4BD8-A08E-E70C6CDC83A0}" type="slidenum">
               <a:rPr lang="en-US" sz="1200" b="0" u="none" strike="noStrike">
                 <a:solidFill>
                   <a:schemeClr val="dk1">
@@ -3970,7 +3970,7 @@
               </a:lnSpc>
               <a:buNone/>
             </a:pPr>
-            <a:fld id="{3305311E-9E6E-4FCC-9268-3A49EBF2E499}" type="slidenum">
+            <a:fld id="{D34AC85E-6C71-4B9F-B070-54D68B26538C}" type="slidenum">
               <a:rPr lang="en-US" sz="1200" b="0" u="none" strike="noStrike">
                 <a:solidFill>
                   <a:schemeClr val="dk1">
@@ -4382,7 +4382,7 @@
               </a:lnSpc>
               <a:buNone/>
             </a:pPr>
-            <a:fld id="{41CBC3B9-73E3-49BC-9496-794D5C4BCBAA}" type="slidenum">
+            <a:fld id="{F5DBB76B-A407-4D13-AE1F-D7063B710A24}" type="slidenum">
               <a:rPr lang="en-US" sz="1200" b="0" u="none" strike="noStrike">
                 <a:solidFill>
                   <a:schemeClr val="dk1">
@@ -5316,7 +5316,7 @@
               </a:lnSpc>
               <a:buNone/>
             </a:pPr>
-            <a:fld id="{6206D6A2-8BE9-4543-9BC1-7252B83C73B2}" type="slidenum">
+            <a:fld id="{B3843246-E8DE-4E3A-A2C3-EC73CB56DC81}" type="slidenum">
               <a:rPr lang="en-US" sz="1200" b="0" u="none" strike="noStrike">
                 <a:solidFill>
                   <a:schemeClr val="dk1">
@@ -6478,7 +6478,7 @@
               </a:lnSpc>
               <a:buNone/>
             </a:pPr>
-            <a:fld id="{DA487A44-077C-4188-976E-B825B2F03E43}" type="slidenum">
+            <a:fld id="{74502FD6-87E1-443E-821E-4B766DF7A368}" type="slidenum">
               <a:rPr lang="en-US" sz="1200" b="0" u="none" strike="noStrike">
                 <a:solidFill>
                   <a:schemeClr val="dk1">
@@ -6800,7 +6800,7 @@
               </a:lnSpc>
               <a:buNone/>
             </a:pPr>
-            <a:fld id="{246B7393-1EEB-4162-A574-BB96D4689528}" type="slidenum">
+            <a:fld id="{460AB504-705C-4715-887D-0E1E7513050F}" type="slidenum">
               <a:rPr lang="en-US" sz="1200" b="0" u="none" strike="noStrike">
                 <a:solidFill>
                   <a:schemeClr val="dk1">
@@ -7050,7 +7050,7 @@
               </a:lnSpc>
               <a:buNone/>
             </a:pPr>
-            <a:fld id="{B142F6E5-6298-4E79-8B91-9F6143C209C9}" type="slidenum">
+            <a:fld id="{E2C76A39-961B-4392-8D01-005307FB2303}" type="slidenum">
               <a:rPr lang="en-US" sz="1200" b="0" u="none" strike="noStrike">
                 <a:solidFill>
                   <a:schemeClr val="dk1">
